--- a/LPHY1365/frottement.pptx
+++ b/LPHY1365/frottement.pptx
@@ -110,6 +110,11 @@
       </a:defRPr>
     </a:lvl9pPr>
   </p:defaultTextStyle>
+  <p:extLst>
+    <p:ext uri="{EFAFB233-063F-42B5-8137-9DF3F51BA10A}">
+      <p15:sldGuideLst xmlns:p15="http://schemas.microsoft.com/office/powerpoint/2012/main"/>
+    </p:ext>
+  </p:extLst>
 </p:presentation>
 </file>
 
@@ -195,7 +200,7 @@
           <a:p>
             <a:fld id="{D0DAFEE0-B525-C645-A2E2-DAB1153915D1}" type="datetimeFigureOut">
               <a:rPr lang="fr-FR" smtClean="0"/>
-              <a:t>13/03/2026</a:t>
+              <a:t>16/03/2026</a:t>
             </a:fld>
             <a:endParaRPr lang="fr-FR"/>
           </a:p>
@@ -993,7 +998,7 @@
           <a:p>
             <a:fld id="{9BB90909-902F-0140-B8AB-824EC19FF0C0}" type="datetimeFigureOut">
               <a:rPr lang="fr-FR" smtClean="0"/>
-              <a:t>13/03/2026</a:t>
+              <a:t>16/03/2026</a:t>
             </a:fld>
             <a:endParaRPr lang="fr-FR"/>
           </a:p>
@@ -1191,7 +1196,7 @@
           <a:p>
             <a:fld id="{9BB90909-902F-0140-B8AB-824EC19FF0C0}" type="datetimeFigureOut">
               <a:rPr lang="fr-FR" smtClean="0"/>
-              <a:t>13/03/2026</a:t>
+              <a:t>16/03/2026</a:t>
             </a:fld>
             <a:endParaRPr lang="fr-FR"/>
           </a:p>
@@ -1399,7 +1404,7 @@
           <a:p>
             <a:fld id="{9BB90909-902F-0140-B8AB-824EC19FF0C0}" type="datetimeFigureOut">
               <a:rPr lang="fr-FR" smtClean="0"/>
-              <a:t>13/03/2026</a:t>
+              <a:t>16/03/2026</a:t>
             </a:fld>
             <a:endParaRPr lang="fr-FR"/>
           </a:p>
@@ -1597,7 +1602,7 @@
           <a:p>
             <a:fld id="{9BB90909-902F-0140-B8AB-824EC19FF0C0}" type="datetimeFigureOut">
               <a:rPr lang="fr-FR" smtClean="0"/>
-              <a:t>13/03/2026</a:t>
+              <a:t>16/03/2026</a:t>
             </a:fld>
             <a:endParaRPr lang="fr-FR"/>
           </a:p>
@@ -1872,7 +1877,7 @@
           <a:p>
             <a:fld id="{9BB90909-902F-0140-B8AB-824EC19FF0C0}" type="datetimeFigureOut">
               <a:rPr lang="fr-FR" smtClean="0"/>
-              <a:t>13/03/2026</a:t>
+              <a:t>16/03/2026</a:t>
             </a:fld>
             <a:endParaRPr lang="fr-FR"/>
           </a:p>
@@ -2137,7 +2142,7 @@
           <a:p>
             <a:fld id="{9BB90909-902F-0140-B8AB-824EC19FF0C0}" type="datetimeFigureOut">
               <a:rPr lang="fr-FR" smtClean="0"/>
-              <a:t>13/03/2026</a:t>
+              <a:t>16/03/2026</a:t>
             </a:fld>
             <a:endParaRPr lang="fr-FR"/>
           </a:p>
@@ -2549,7 +2554,7 @@
           <a:p>
             <a:fld id="{9BB90909-902F-0140-B8AB-824EC19FF0C0}" type="datetimeFigureOut">
               <a:rPr lang="fr-FR" smtClean="0"/>
-              <a:t>13/03/2026</a:t>
+              <a:t>16/03/2026</a:t>
             </a:fld>
             <a:endParaRPr lang="fr-FR"/>
           </a:p>
@@ -2690,7 +2695,7 @@
           <a:p>
             <a:fld id="{9BB90909-902F-0140-B8AB-824EC19FF0C0}" type="datetimeFigureOut">
               <a:rPr lang="fr-FR" smtClean="0"/>
-              <a:t>13/03/2026</a:t>
+              <a:t>16/03/2026</a:t>
             </a:fld>
             <a:endParaRPr lang="fr-FR"/>
           </a:p>
@@ -2803,7 +2808,7 @@
           <a:p>
             <a:fld id="{9BB90909-902F-0140-B8AB-824EC19FF0C0}" type="datetimeFigureOut">
               <a:rPr lang="fr-FR" smtClean="0"/>
-              <a:t>13/03/2026</a:t>
+              <a:t>16/03/2026</a:t>
             </a:fld>
             <a:endParaRPr lang="fr-FR"/>
           </a:p>
@@ -3114,7 +3119,7 @@
           <a:p>
             <a:fld id="{9BB90909-902F-0140-B8AB-824EC19FF0C0}" type="datetimeFigureOut">
               <a:rPr lang="fr-FR" smtClean="0"/>
-              <a:t>13/03/2026</a:t>
+              <a:t>16/03/2026</a:t>
             </a:fld>
             <a:endParaRPr lang="fr-FR"/>
           </a:p>
@@ -3402,7 +3407,7 @@
           <a:p>
             <a:fld id="{9BB90909-902F-0140-B8AB-824EC19FF0C0}" type="datetimeFigureOut">
               <a:rPr lang="fr-FR" smtClean="0"/>
-              <a:t>13/03/2026</a:t>
+              <a:t>16/03/2026</a:t>
             </a:fld>
             <a:endParaRPr lang="fr-FR"/>
           </a:p>
@@ -3643,7 +3648,7 @@
           <a:p>
             <a:fld id="{9BB90909-902F-0140-B8AB-824EC19FF0C0}" type="datetimeFigureOut">
               <a:rPr lang="fr-FR" smtClean="0"/>
-              <a:t>13/03/2026</a:t>
+              <a:t>16/03/2026</a:t>
             </a:fld>
             <a:endParaRPr lang="fr-FR"/>
           </a:p>
@@ -4955,6 +4960,50 @@
           </a:prstGeom>
         </p:spPr>
       </p:pic>
+      <p:cxnSp>
+        <p:nvCxnSpPr>
+          <p:cNvPr id="2" name="Connecteur droit avec flèche 1">
+            <a:extLst>
+              <a:ext uri="{FF2B5EF4-FFF2-40B4-BE49-F238E27FC236}">
+                <a16:creationId xmlns:a16="http://schemas.microsoft.com/office/drawing/2014/main" id="{7EE5D31F-CFFB-67E2-C20A-9DD9A1E8F079}"/>
+              </a:ext>
+            </a:extLst>
+          </p:cNvPr>
+          <p:cNvCxnSpPr>
+            <a:cxnSpLocks/>
+          </p:cNvCxnSpPr>
+          <p:nvPr/>
+        </p:nvCxnSpPr>
+        <p:spPr>
+          <a:xfrm flipV="1">
+            <a:off x="8156489" y="2616820"/>
+            <a:ext cx="0" cy="1088147"/>
+          </a:xfrm>
+          <a:prstGeom prst="straightConnector1">
+            <a:avLst/>
+          </a:prstGeom>
+          <a:ln w="57150">
+            <a:solidFill>
+              <a:srgbClr val="78206E"/>
+            </a:solidFill>
+            <a:tailEnd type="stealth"/>
+          </a:ln>
+        </p:spPr>
+        <p:style>
+          <a:lnRef idx="2">
+            <a:schemeClr val="accent1"/>
+          </a:lnRef>
+          <a:fillRef idx="0">
+            <a:schemeClr val="accent1"/>
+          </a:fillRef>
+          <a:effectRef idx="1">
+            <a:schemeClr val="accent1"/>
+          </a:effectRef>
+          <a:fontRef idx="minor">
+            <a:schemeClr val="tx1"/>
+          </a:fontRef>
+        </p:style>
+      </p:cxnSp>
     </p:spTree>
     <p:extLst>
       <p:ext uri="{BB962C8B-B14F-4D97-AF65-F5344CB8AC3E}">

--- a/LPHY1365/frottement.pptx
+++ b/LPHY1365/frottement.pptx
@@ -200,7 +200,7 @@
           <a:p>
             <a:fld id="{D0DAFEE0-B525-C645-A2E2-DAB1153915D1}" type="datetimeFigureOut">
               <a:rPr lang="fr-FR" smtClean="0"/>
-              <a:t>16/03/2026</a:t>
+              <a:t>17/03/2026</a:t>
             </a:fld>
             <a:endParaRPr lang="fr-FR"/>
           </a:p>
@@ -511,7 +511,10 @@
           <a:bodyPr/>
           <a:lstStyle/>
           <a:p>
-            <a:endParaRPr lang="fr-FR" dirty="0"/>
+            <a:r>
+              <a:rPr lang="fr-FR" dirty="0"/>
+              <a:t>@</a:t>
+            </a:r>
           </a:p>
         </p:txBody>
       </p:sp>
@@ -998,7 +1001,7 @@
           <a:p>
             <a:fld id="{9BB90909-902F-0140-B8AB-824EC19FF0C0}" type="datetimeFigureOut">
               <a:rPr lang="fr-FR" smtClean="0"/>
-              <a:t>16/03/2026</a:t>
+              <a:t>17/03/2026</a:t>
             </a:fld>
             <a:endParaRPr lang="fr-FR"/>
           </a:p>
@@ -1196,7 +1199,7 @@
           <a:p>
             <a:fld id="{9BB90909-902F-0140-B8AB-824EC19FF0C0}" type="datetimeFigureOut">
               <a:rPr lang="fr-FR" smtClean="0"/>
-              <a:t>16/03/2026</a:t>
+              <a:t>17/03/2026</a:t>
             </a:fld>
             <a:endParaRPr lang="fr-FR"/>
           </a:p>
@@ -1404,7 +1407,7 @@
           <a:p>
             <a:fld id="{9BB90909-902F-0140-B8AB-824EC19FF0C0}" type="datetimeFigureOut">
               <a:rPr lang="fr-FR" smtClean="0"/>
-              <a:t>16/03/2026</a:t>
+              <a:t>17/03/2026</a:t>
             </a:fld>
             <a:endParaRPr lang="fr-FR"/>
           </a:p>
@@ -1602,7 +1605,7 @@
           <a:p>
             <a:fld id="{9BB90909-902F-0140-B8AB-824EC19FF0C0}" type="datetimeFigureOut">
               <a:rPr lang="fr-FR" smtClean="0"/>
-              <a:t>16/03/2026</a:t>
+              <a:t>17/03/2026</a:t>
             </a:fld>
             <a:endParaRPr lang="fr-FR"/>
           </a:p>
@@ -1877,7 +1880,7 @@
           <a:p>
             <a:fld id="{9BB90909-902F-0140-B8AB-824EC19FF0C0}" type="datetimeFigureOut">
               <a:rPr lang="fr-FR" smtClean="0"/>
-              <a:t>16/03/2026</a:t>
+              <a:t>17/03/2026</a:t>
             </a:fld>
             <a:endParaRPr lang="fr-FR"/>
           </a:p>
@@ -2142,7 +2145,7 @@
           <a:p>
             <a:fld id="{9BB90909-902F-0140-B8AB-824EC19FF0C0}" type="datetimeFigureOut">
               <a:rPr lang="fr-FR" smtClean="0"/>
-              <a:t>16/03/2026</a:t>
+              <a:t>17/03/2026</a:t>
             </a:fld>
             <a:endParaRPr lang="fr-FR"/>
           </a:p>
@@ -2554,7 +2557,7 @@
           <a:p>
             <a:fld id="{9BB90909-902F-0140-B8AB-824EC19FF0C0}" type="datetimeFigureOut">
               <a:rPr lang="fr-FR" smtClean="0"/>
-              <a:t>16/03/2026</a:t>
+              <a:t>17/03/2026</a:t>
             </a:fld>
             <a:endParaRPr lang="fr-FR"/>
           </a:p>
@@ -2695,7 +2698,7 @@
           <a:p>
             <a:fld id="{9BB90909-902F-0140-B8AB-824EC19FF0C0}" type="datetimeFigureOut">
               <a:rPr lang="fr-FR" smtClean="0"/>
-              <a:t>16/03/2026</a:t>
+              <a:t>17/03/2026</a:t>
             </a:fld>
             <a:endParaRPr lang="fr-FR"/>
           </a:p>
@@ -2808,7 +2811,7 @@
           <a:p>
             <a:fld id="{9BB90909-902F-0140-B8AB-824EC19FF0C0}" type="datetimeFigureOut">
               <a:rPr lang="fr-FR" smtClean="0"/>
-              <a:t>16/03/2026</a:t>
+              <a:t>17/03/2026</a:t>
             </a:fld>
             <a:endParaRPr lang="fr-FR"/>
           </a:p>
@@ -3119,7 +3122,7 @@
           <a:p>
             <a:fld id="{9BB90909-902F-0140-B8AB-824EC19FF0C0}" type="datetimeFigureOut">
               <a:rPr lang="fr-FR" smtClean="0"/>
-              <a:t>16/03/2026</a:t>
+              <a:t>17/03/2026</a:t>
             </a:fld>
             <a:endParaRPr lang="fr-FR"/>
           </a:p>
@@ -3407,7 +3410,7 @@
           <a:p>
             <a:fld id="{9BB90909-902F-0140-B8AB-824EC19FF0C0}" type="datetimeFigureOut">
               <a:rPr lang="fr-FR" smtClean="0"/>
-              <a:t>16/03/2026</a:t>
+              <a:t>17/03/2026</a:t>
             </a:fld>
             <a:endParaRPr lang="fr-FR"/>
           </a:p>
@@ -3648,7 +3651,7 @@
           <a:p>
             <a:fld id="{9BB90909-902F-0140-B8AB-824EC19FF0C0}" type="datetimeFigureOut">
               <a:rPr lang="fr-FR" smtClean="0"/>
-              <a:t>16/03/2026</a:t>
+              <a:t>17/03/2026</a:t>
             </a:fld>
             <a:endParaRPr lang="fr-FR"/>
           </a:p>
@@ -4960,50 +4963,6 @@
           </a:prstGeom>
         </p:spPr>
       </p:pic>
-      <p:cxnSp>
-        <p:nvCxnSpPr>
-          <p:cNvPr id="2" name="Connecteur droit avec flèche 1">
-            <a:extLst>
-              <a:ext uri="{FF2B5EF4-FFF2-40B4-BE49-F238E27FC236}">
-                <a16:creationId xmlns:a16="http://schemas.microsoft.com/office/drawing/2014/main" id="{7EE5D31F-CFFB-67E2-C20A-9DD9A1E8F079}"/>
-              </a:ext>
-            </a:extLst>
-          </p:cNvPr>
-          <p:cNvCxnSpPr>
-            <a:cxnSpLocks/>
-          </p:cNvCxnSpPr>
-          <p:nvPr/>
-        </p:nvCxnSpPr>
-        <p:spPr>
-          <a:xfrm flipV="1">
-            <a:off x="8156489" y="2616820"/>
-            <a:ext cx="0" cy="1088147"/>
-          </a:xfrm>
-          <a:prstGeom prst="straightConnector1">
-            <a:avLst/>
-          </a:prstGeom>
-          <a:ln w="57150">
-            <a:solidFill>
-              <a:srgbClr val="78206E"/>
-            </a:solidFill>
-            <a:tailEnd type="stealth"/>
-          </a:ln>
-        </p:spPr>
-        <p:style>
-          <a:lnRef idx="2">
-            <a:schemeClr val="accent1"/>
-          </a:lnRef>
-          <a:fillRef idx="0">
-            <a:schemeClr val="accent1"/>
-          </a:fillRef>
-          <a:effectRef idx="1">
-            <a:schemeClr val="accent1"/>
-          </a:effectRef>
-          <a:fontRef idx="minor">
-            <a:schemeClr val="tx1"/>
-          </a:fontRef>
-        </p:style>
-      </p:cxnSp>
     </p:spTree>
     <p:extLst>
       <p:ext uri="{BB962C8B-B14F-4D97-AF65-F5344CB8AC3E}">
